--- a/Fridge2Fork_MidSemester.pptx
+++ b/Fridge2Fork_MidSemester.pptx
@@ -3035,7 +3035,29 @@
                 <a:ea typeface="Calibri" pitchFamily="34" charset="-122"/>
                 <a:cs typeface="Calibri" pitchFamily="34" charset="-120"/>
               </a:rPr>
-              <a:t>Model is static; personalization isn't</a:t>
+              <a:t>Model </a:t>
+            </a:r>
+            <a:r>
+              <a:rPr lang="en-US" sz="1100" i="1">
+                <a:solidFill>
+                  <a:srgbClr val="4A6080"/>
+                </a:solidFill>
+                <a:latin typeface="Calibri" pitchFamily="34" charset="0"/>
+                <a:ea typeface="Calibri" pitchFamily="34" charset="-122"/>
+                <a:cs typeface="Calibri" pitchFamily="34" charset="-120"/>
+              </a:rPr>
+              <a:t>is static, </a:t>
+            </a:r>
+            <a:r>
+              <a:rPr lang="en-US" sz="1100" i="1" dirty="0">
+                <a:solidFill>
+                  <a:srgbClr val="4A6080"/>
+                </a:solidFill>
+                <a:latin typeface="Calibri" pitchFamily="34" charset="0"/>
+                <a:ea typeface="Calibri" pitchFamily="34" charset="-122"/>
+                <a:cs typeface="Calibri" pitchFamily="34" charset="-120"/>
+              </a:rPr>
+              <a:t>personalization isn't</a:t>
             </a:r>
             <a:endParaRPr lang="en-US" sz="1100" dirty="0"/>
           </a:p>
@@ -3511,7 +3533,7 @@
         </p:nvSpPr>
         <p:spPr>
           <a:xfrm>
-            <a:off x="4736592" y="1664208"/>
+            <a:off x="4736592" y="1536085"/>
             <a:ext cx="4023360" cy="274320"/>
           </a:xfrm>
           <a:prstGeom prst="rect">
@@ -3550,7 +3572,7 @@
         </p:nvSpPr>
         <p:spPr>
           <a:xfrm>
-            <a:off x="4736592" y="1984248"/>
+            <a:off x="4736592" y="1771977"/>
             <a:ext cx="4023360" cy="292608"/>
           </a:xfrm>
           <a:prstGeom prst="rect">
@@ -3589,7 +3611,7 @@
         </p:nvSpPr>
         <p:spPr>
           <a:xfrm>
-            <a:off x="4736592" y="2331720"/>
+            <a:off x="4736592" y="2009234"/>
             <a:ext cx="4023360" cy="292608"/>
           </a:xfrm>
           <a:prstGeom prst="rect">
@@ -3628,7 +3650,7 @@
         </p:nvSpPr>
         <p:spPr>
           <a:xfrm>
-            <a:off x="4732020" y="2866645"/>
+            <a:off x="4732020" y="2421692"/>
             <a:ext cx="4023360" cy="274320"/>
           </a:xfrm>
           <a:prstGeom prst="rect">
@@ -3667,7 +3689,7 @@
         </p:nvSpPr>
         <p:spPr>
           <a:xfrm>
-            <a:off x="4736592" y="3136392"/>
+            <a:off x="4736592" y="2566364"/>
             <a:ext cx="4023360" cy="777240"/>
           </a:xfrm>
           <a:prstGeom prst="rect">
@@ -3757,7 +3779,7 @@
               <a:buNone/>
             </a:pPr>
             <a:r>
-              <a:rPr lang="en-US" sz="1000" i="1" dirty="0">
+              <a:rPr lang="en-GB" sz="1000" i="1" dirty="0">
                 <a:solidFill>
                   <a:srgbClr val="4A6080"/>
                 </a:solidFill>
@@ -3765,9 +3787,128 @@
                 <a:ea typeface="Calibri" pitchFamily="34" charset="-122"/>
                 <a:cs typeface="Calibri" pitchFamily="34" charset="-120"/>
               </a:rPr>
-              <a:t>Heavy ML stays offline.  Lightweight personalization updates continuously.</a:t>
+              <a:t>Heavy ML Item factors are fixed. Who you are within that space is computed fresh every request.</a:t>
             </a:r>
             <a:endParaRPr lang="en-US" sz="1000" dirty="0"/>
+          </a:p>
+        </p:txBody>
+      </p:sp>
+      <p:sp>
+        <p:nvSpPr>
+          <p:cNvPr id="24" name="Text 17">
+            <a:extLst>
+              <a:ext uri="{FF2B5EF4-FFF2-40B4-BE49-F238E27FC236}">
+                <a16:creationId xmlns:a16="http://schemas.microsoft.com/office/drawing/2014/main" id="{44BAD1D9-0E86-84B8-DE58-7C7AC30D6910}"/>
+              </a:ext>
+            </a:extLst>
+          </p:cNvPr>
+          <p:cNvSpPr/>
+          <p:nvPr/>
+        </p:nvSpPr>
+        <p:spPr>
+          <a:xfrm>
+            <a:off x="4727448" y="3535625"/>
+            <a:ext cx="4023360" cy="274320"/>
+          </a:xfrm>
+          <a:prstGeom prst="rect">
+            <a:avLst/>
+          </a:prstGeom>
+          <a:noFill/>
+          <a:ln/>
+        </p:spPr>
+        <p:txBody>
+          <a:bodyPr wrap="square" lIns="0" tIns="0" rIns="0" bIns="0" rtlCol="0" anchor="ctr"/>
+          <a:lstStyle/>
+          <a:p>
+            <a:pPr marL="0" indent="0" algn="l">
+              <a:buNone/>
+            </a:pPr>
+            <a:r>
+              <a:rPr lang="en-GB" sz="1200" b="1" dirty="0">
+                <a:solidFill>
+                  <a:schemeClr val="accent2">
+                    <a:lumMod val="75000"/>
+                  </a:schemeClr>
+                </a:solidFill>
+                <a:latin typeface="Calibri" pitchFamily="34" charset="0"/>
+                <a:ea typeface="Calibri" pitchFamily="34" charset="-122"/>
+                <a:cs typeface="Calibri" pitchFamily="34" charset="-120"/>
+              </a:rPr>
+              <a:t>CF user vector (computed every request)</a:t>
+            </a:r>
+            <a:endParaRPr lang="en-US" sz="1200" dirty="0">
+              <a:solidFill>
+                <a:schemeClr val="accent2">
+                  <a:lumMod val="75000"/>
+                </a:schemeClr>
+              </a:solidFill>
+            </a:endParaRPr>
+          </a:p>
+        </p:txBody>
+      </p:sp>
+      <p:sp>
+        <p:nvSpPr>
+          <p:cNvPr id="25" name="Text 18">
+            <a:extLst>
+              <a:ext uri="{FF2B5EF4-FFF2-40B4-BE49-F238E27FC236}">
+                <a16:creationId xmlns:a16="http://schemas.microsoft.com/office/drawing/2014/main" id="{E98E5600-54C5-6721-585B-12BD67503CBD}"/>
+              </a:ext>
+            </a:extLst>
+          </p:cNvPr>
+          <p:cNvSpPr/>
+          <p:nvPr/>
+        </p:nvSpPr>
+        <p:spPr>
+          <a:xfrm>
+            <a:off x="4732020" y="3598657"/>
+            <a:ext cx="2962819" cy="777240"/>
+          </a:xfrm>
+          <a:prstGeom prst="rect">
+            <a:avLst/>
+          </a:prstGeom>
+          <a:noFill/>
+          <a:ln/>
+        </p:spPr>
+        <p:txBody>
+          <a:bodyPr wrap="square" lIns="0" tIns="0" rIns="0" bIns="0" rtlCol="0" anchor="ctr"/>
+          <a:lstStyle/>
+          <a:p>
+            <a:pPr marL="0" indent="0" algn="l">
+              <a:buNone/>
+            </a:pPr>
+            <a:r>
+              <a:rPr lang="en-GB" sz="1100" dirty="0">
+                <a:solidFill>
+                  <a:srgbClr val="DCE6F0"/>
+                </a:solidFill>
+                <a:latin typeface="Calibri" pitchFamily="34" charset="0"/>
+                <a:ea typeface="Calibri" pitchFamily="34" charset="-122"/>
+                <a:cs typeface="Calibri" pitchFamily="34" charset="-120"/>
+              </a:rPr>
+              <a:t>Fold-in against frozen item factors – </a:t>
+            </a:r>
+            <a:br>
+              <a:rPr lang="en-GB" sz="1100" dirty="0">
+                <a:solidFill>
+                  <a:srgbClr val="DCE6F0"/>
+                </a:solidFill>
+                <a:latin typeface="Calibri" pitchFamily="34" charset="0"/>
+                <a:ea typeface="Calibri" pitchFamily="34" charset="-122"/>
+                <a:cs typeface="Calibri" pitchFamily="34" charset="-120"/>
+              </a:rPr>
+            </a:br>
+            <a:r>
+              <a:rPr lang="en-GB" sz="1100" dirty="0">
+                <a:solidFill>
+                  <a:srgbClr val="DCE6F0"/>
+                </a:solidFill>
+                <a:latin typeface="Calibri" pitchFamily="34" charset="0"/>
+                <a:ea typeface="Calibri" pitchFamily="34" charset="-122"/>
+                <a:cs typeface="Calibri" pitchFamily="34" charset="-120"/>
+              </a:rPr>
+              <a:t>user position solved live from their ratings in the DB</a:t>
+            </a:r>
+            <a:endParaRPr lang="en-US" sz="1100" dirty="0"/>
           </a:p>
         </p:txBody>
       </p:sp>
